--- a/assets/pptx/catalog-519.pptx
+++ b/assets/pptx/catalog-519.pptx
@@ -3279,7 +3279,7 @@
                 <a:ea typeface="Ebrima"/>
                 <a:cs typeface="Ebrima"/>
               </a:rPr>
-              <a:t>(2x)</a:t>
+              <a:t>2x</a:t>
             </a:r>
           </a:p>
         </p:txBody>
@@ -3413,7 +3413,7 @@
                 <a:ea typeface="Ebrima"/>
                 <a:cs typeface="Ebrima"/>
               </a:rPr>
-              <a:t>(2x) ምን ይሻለኛል</a:t>
+              <a:t>2x ምን ይሻለኛል</a:t>
             </a:r>
           </a:p>
         </p:txBody>
@@ -3480,7 +3480,7 @@
                 <a:ea typeface="Ebrima"/>
                 <a:cs typeface="Ebrima"/>
               </a:rPr>
-              <a:t>ዝም ብሎ እግዚአብሔር ይባርከኛል ይባርከኛል (2x)</a:t>
+              <a:t>ዝም ብሎ እግዚአብሔር ይባርከኛል ይባርከኛል 2x</a:t>
             </a:r>
           </a:p>
         </p:txBody>
@@ -3547,7 +3547,7 @@
                 <a:ea typeface="Ebrima"/>
                 <a:cs typeface="Ebrima"/>
               </a:rPr>
-              <a:t>ኧረ በረከቱ ገደብ አጣ (4x)</a:t>
+              <a:t>ኧረ በረከቱ ገደብ አጣ 4x</a:t>
             </a:r>
           </a:p>
         </p:txBody>
@@ -3882,7 +3882,7 @@
                 <a:ea typeface="Ebrima"/>
                 <a:cs typeface="Ebrima"/>
               </a:rPr>
-              <a:t>(4x)</a:t>
+              <a:t>4x</a:t>
             </a:r>
           </a:p>
         </p:txBody>
@@ -4217,7 +4217,7 @@
                 <a:ea typeface="Ebrima"/>
                 <a:cs typeface="Ebrima"/>
               </a:rPr>
-              <a:t>(3x)</a:t>
+              <a:t>3x</a:t>
             </a:r>
           </a:p>
         </p:txBody>
@@ -4418,7 +4418,7 @@
                 <a:ea typeface="Ebrima"/>
                 <a:cs typeface="Ebrima"/>
               </a:rPr>
-              <a:t>(3x)</a:t>
+              <a:t>3x</a:t>
             </a:r>
           </a:p>
         </p:txBody>
@@ -4552,7 +4552,7 @@
                 <a:ea typeface="Ebrima"/>
                 <a:cs typeface="Ebrima"/>
               </a:rPr>
-              <a:t>(4x)</a:t>
+              <a:t>4x</a:t>
             </a:r>
           </a:p>
         </p:txBody>
@@ -4619,7 +4619,7 @@
                 <a:ea typeface="Ebrima"/>
                 <a:cs typeface="Ebrima"/>
               </a:rPr>
-              <a:t>ኧረ በረከቱ ገደብ አጣ (4x)</a:t>
+              <a:t>ኧረ በረከቱ ገደብ አጣ 4x</a:t>
             </a:r>
           </a:p>
         </p:txBody>
@@ -4820,7 +4820,7 @@
                 <a:ea typeface="Ebrima"/>
                 <a:cs typeface="Ebrima"/>
               </a:rPr>
-              <a:t>ድንቅ እኮ ነው አምላካችሁ (3x)</a:t>
+              <a:t>ድንቅ እኮ ነው አምላካችሁ 3x</a:t>
             </a:r>
           </a:p>
         </p:txBody>
@@ -4887,7 +4887,7 @@
                 <a:ea typeface="Ebrima"/>
                 <a:cs typeface="Ebrima"/>
               </a:rPr>
-              <a:t>እርሱ እኮ ነው የሞላው በመስፈሪያው ሰፈረው ነቀነቀውና ጨቆነው (4x)</a:t>
+              <a:t>እርሱ እኮ ነው የሞላው በመስፈሪያው ሰፈረው ነቀነቀውና ጨቆነው 4x</a:t>
             </a:r>
           </a:p>
         </p:txBody>
@@ -5222,7 +5222,7 @@
                 <a:ea typeface="Ebrima"/>
                 <a:cs typeface="Ebrima"/>
               </a:rPr>
-              <a:t>(2x)</a:t>
+              <a:t>2x</a:t>
             </a:r>
           </a:p>
         </p:txBody>
@@ -5356,7 +5356,7 @@
                 <a:ea typeface="Ebrima"/>
                 <a:cs typeface="Ebrima"/>
               </a:rPr>
-              <a:t>ግን ለበረከቱ ገደብ የለው (6x)</a:t>
+              <a:t>ግን ለበረከቱ ገደብ የለው 6x</a:t>
             </a:r>
           </a:p>
         </p:txBody>
@@ -5423,7 +5423,7 @@
                 <a:ea typeface="Ebrima"/>
                 <a:cs typeface="Ebrima"/>
               </a:rPr>
-              <a:t>(2x)</a:t>
+              <a:t>2x</a:t>
             </a:r>
           </a:p>
         </p:txBody>
@@ -5490,7 +5490,7 @@
                 <a:ea typeface="Ebrima"/>
                 <a:cs typeface="Ebrima"/>
               </a:rPr>
-              <a:t>ኧረ በረከቱ ገደብ አጣ (6x)</a:t>
+              <a:t>ኧረ በረከቱ ገደብ አጣ 6x</a:t>
             </a:r>
           </a:p>
         </p:txBody>
@@ -5691,7 +5691,7 @@
                 <a:ea typeface="Ebrima"/>
                 <a:cs typeface="Ebrima"/>
               </a:rPr>
-              <a:t>(2x)</a:t>
+              <a:t>2x</a:t>
             </a:r>
           </a:p>
         </p:txBody>
